--- a/site/clases/parte-1-machine-learning-clasico/094-mds-isomap-t-sne-umap-lda/clase-094-mds-isomap-t-sne-umap-lda-presentacion.pptx
+++ b/site/clases/parte-1-machine-learning-clasico/094-mds-isomap-t-sne-umap-lda/clase-094-mds-isomap-t-sne-umap-lda-presentacion.pptx
@@ -3272,7 +3272,7 @@
                 </a:solidFill>
                 <a:latin typeface="Segoe UI"/>
               </a:rPr>
-              <a:t>Parte: 1 — Machine Learning Clásico · Fuente: Géron, cap. 8 + UMAP docs.  Duración estimada: 80 min.</a:t>
+              <a:t>Parte: 1 — Machine Learning Clásico · Fuente: Géron, cap. 8 + UMAP docs.  Duración estimada: 80 min. · Nivel: Avanzado</a:t>
             </a:r>
           </a:p>
         </p:txBody>
@@ -3581,7 +3581,7 @@
                 </a:solidFill>
                 <a:latin typeface="Segoe UI"/>
               </a:rPr>
-              <a:t>Parte: 1 — Machine Learning Clásico · Fuente: Géron, cap. 8 + UMAP docs.  Duración estimada: 80 min.</a:t>
+              <a:t>Parte: 1 — Machine Learning Clásico · Fuente: Géron, cap. 8 + UMAP docs.  Duración estimada: 80 min. · Nivel: Avanzado</a:t>
             </a:r>
           </a:p>
         </p:txBody>
@@ -4801,7 +4801,7 @@
                 </a:solidFill>
                 <a:latin typeface="Segoe UI"/>
               </a:rPr>
-              <a:t>Primer bloque ejecutable del notebook.</a:t>
+              <a:t>Swiss roll para métodos de manifold; digits (subset de 500) para t-SNE/LDA.</a:t>
             </a:r>
           </a:p>
         </p:txBody>
@@ -4888,7 +4888,273 @@
                 </a:solidFill>
                 <a:latin typeface="Courier New"/>
               </a:rPr>
-              <a:t># Imports y configuración inicial</a:t>
+              <a:t>import numpy as np</a:t>
+            </a:r>
+          </a:p>
+          <a:p>
+            <a:pPr>
+              <a:defRPr sz="1200" b="0">
+                <a:solidFill>
+                  <a:srgbClr val="F8FAFC"/>
+                </a:solidFill>
+                <a:latin typeface="Courier New"/>
+              </a:defRPr>
+            </a:pPr>
+            <a:r>
+              <a:rPr sz="1200" b="0">
+                <a:solidFill>
+                  <a:srgbClr val="F8FAFC"/>
+                </a:solidFill>
+                <a:latin typeface="Courier New"/>
+              </a:rPr>
+              <a:t>import matplotlib.pyplot as plt</a:t>
+            </a:r>
+          </a:p>
+          <a:p>
+            <a:pPr>
+              <a:defRPr sz="1200" b="0">
+                <a:solidFill>
+                  <a:srgbClr val="F8FAFC"/>
+                </a:solidFill>
+                <a:latin typeface="Courier New"/>
+              </a:defRPr>
+            </a:pPr>
+            <a:r>
+              <a:rPr sz="1200" b="0">
+                <a:solidFill>
+                  <a:srgbClr val="F8FAFC"/>
+                </a:solidFill>
+                <a:latin typeface="Courier New"/>
+              </a:rPr>
+              <a:t>from sklearn.datasets import make_swiss_roll, load_digits</a:t>
+            </a:r>
+          </a:p>
+          <a:p>
+            <a:pPr>
+              <a:defRPr sz="1200" b="0">
+                <a:solidFill>
+                  <a:srgbClr val="F8FAFC"/>
+                </a:solidFill>
+                <a:latin typeface="Courier New"/>
+              </a:defRPr>
+            </a:pPr>
+            <a:r>
+              <a:rPr sz="1200" b="0">
+                <a:solidFill>
+                  <a:srgbClr val="F8FAFC"/>
+                </a:solidFill>
+                <a:latin typeface="Courier New"/>
+              </a:rPr>
+              <a:t>from sklearn.preprocessing import StandardScaler</a:t>
+            </a:r>
+          </a:p>
+          <a:p>
+            <a:pPr>
+              <a:defRPr sz="1200" b="0">
+                <a:solidFill>
+                  <a:srgbClr val="F8FAFC"/>
+                </a:solidFill>
+                <a:latin typeface="Courier New"/>
+              </a:defRPr>
+            </a:pPr>
+            <a:r>
+              <a:rPr sz="1200" b="0">
+                <a:solidFill>
+                  <a:srgbClr val="F8FAFC"/>
+                </a:solidFill>
+                <a:latin typeface="Courier New"/>
+              </a:rPr>
+              <a:t> </a:t>
+            </a:r>
+          </a:p>
+          <a:p>
+            <a:pPr>
+              <a:defRPr sz="1200" b="0">
+                <a:solidFill>
+                  <a:srgbClr val="F8FAFC"/>
+                </a:solidFill>
+                <a:latin typeface="Courier New"/>
+              </a:defRPr>
+            </a:pPr>
+            <a:r>
+              <a:rPr sz="1200" b="0">
+                <a:solidFill>
+                  <a:srgbClr val="F8FAFC"/>
+                </a:solidFill>
+                <a:latin typeface="Courier New"/>
+              </a:rPr>
+              <a:t>np.random.seed(42)</a:t>
+            </a:r>
+          </a:p>
+          <a:p>
+            <a:pPr>
+              <a:defRPr sz="1200" b="0">
+                <a:solidFill>
+                  <a:srgbClr val="F8FAFC"/>
+                </a:solidFill>
+                <a:latin typeface="Courier New"/>
+              </a:defRPr>
+            </a:pPr>
+            <a:r>
+              <a:rPr sz="1200" b="0">
+                <a:solidFill>
+                  <a:srgbClr val="F8FAFC"/>
+                </a:solidFill>
+                <a:latin typeface="Courier New"/>
+              </a:rPr>
+              <a:t>rng = np.random.default_rng(42)</a:t>
+            </a:r>
+          </a:p>
+          <a:p>
+            <a:pPr>
+              <a:defRPr sz="1200" b="0">
+                <a:solidFill>
+                  <a:srgbClr val="F8FAFC"/>
+                </a:solidFill>
+                <a:latin typeface="Courier New"/>
+              </a:defRPr>
+            </a:pPr>
+            <a:r>
+              <a:rPr sz="1200" b="0">
+                <a:solidFill>
+                  <a:srgbClr val="F8FAFC"/>
+                </a:solidFill>
+                <a:latin typeface="Courier New"/>
+              </a:rPr>
+              <a:t> </a:t>
+            </a:r>
+          </a:p>
+          <a:p>
+            <a:pPr>
+              <a:defRPr sz="1200" b="0">
+                <a:solidFill>
+                  <a:srgbClr val="F8FAFC"/>
+                </a:solidFill>
+                <a:latin typeface="Courier New"/>
+              </a:defRPr>
+            </a:pPr>
+            <a:r>
+              <a:rPr sz="1200" b="0">
+                <a:solidFill>
+                  <a:srgbClr val="F8FAFC"/>
+                </a:solidFill>
+                <a:latin typeface="Courier New"/>
+              </a:rPr>
+              <a:t>Xsr, color = make_swiss_roll(n_samples=800, noise=0.05, random_state=42)</a:t>
+            </a:r>
+          </a:p>
+          <a:p>
+            <a:pPr>
+              <a:defRPr sz="1200" b="0">
+                <a:solidFill>
+                  <a:srgbClr val="F8FAFC"/>
+                </a:solidFill>
+                <a:latin typeface="Courier New"/>
+              </a:defRPr>
+            </a:pPr>
+            <a:r>
+              <a:rPr sz="1200" b="0">
+                <a:solidFill>
+                  <a:srgbClr val="F8FAFC"/>
+                </a:solidFill>
+                <a:latin typeface="Courier New"/>
+              </a:rPr>
+              <a:t> </a:t>
+            </a:r>
+          </a:p>
+          <a:p>
+            <a:pPr>
+              <a:defRPr sz="1200" b="0">
+                <a:solidFill>
+                  <a:srgbClr val="F8FAFC"/>
+                </a:solidFill>
+                <a:latin typeface="Courier New"/>
+              </a:defRPr>
+            </a:pPr>
+            <a:r>
+              <a:rPr sz="1200" b="0">
+                <a:solidFill>
+                  <a:srgbClr val="F8FAFC"/>
+                </a:solidFill>
+                <a:latin typeface="Courier New"/>
+              </a:rPr>
+              <a:t>Xd_full, yd_full = load_digits(return_X_y=True)</a:t>
+            </a:r>
+          </a:p>
+          <a:p>
+            <a:pPr>
+              <a:defRPr sz="1200" b="0">
+                <a:solidFill>
+                  <a:srgbClr val="F8FAFC"/>
+                </a:solidFill>
+                <a:latin typeface="Courier New"/>
+              </a:defRPr>
+            </a:pPr>
+            <a:r>
+              <a:rPr sz="1200" b="0">
+                <a:solidFill>
+                  <a:srgbClr val="F8FAFC"/>
+                </a:solidFill>
+                <a:latin typeface="Courier New"/>
+              </a:rPr>
+              <a:t>idx = rng.choice(len(Xd_full), size=500, replace=False)</a:t>
+            </a:r>
+          </a:p>
+          <a:p>
+            <a:pPr>
+              <a:defRPr sz="1200" b="0">
+                <a:solidFill>
+                  <a:srgbClr val="F8FAFC"/>
+                </a:solidFill>
+                <a:latin typeface="Courier New"/>
+              </a:defRPr>
+            </a:pPr>
+            <a:r>
+              <a:rPr sz="1200" b="0">
+                <a:solidFill>
+                  <a:srgbClr val="F8FAFC"/>
+                </a:solidFill>
+                <a:latin typeface="Courier New"/>
+              </a:rPr>
+              <a:t>Xd, yd = Xd_full[idx], yd_full[idx]</a:t>
+            </a:r>
+          </a:p>
+          <a:p>
+            <a:pPr>
+              <a:defRPr sz="1200" b="0">
+                <a:solidFill>
+                  <a:srgbClr val="F8FAFC"/>
+                </a:solidFill>
+                <a:latin typeface="Courier New"/>
+              </a:defRPr>
+            </a:pPr>
+            <a:r>
+              <a:rPr sz="1200" b="0">
+                <a:solidFill>
+                  <a:srgbClr val="F8FAFC"/>
+                </a:solidFill>
+                <a:latin typeface="Courier New"/>
+              </a:rPr>
+              <a:t>Xd_s = StandardScaler().fit_transform(Xd)</a:t>
+            </a:r>
+          </a:p>
+          <a:p>
+            <a:pPr>
+              <a:defRPr sz="1200" b="0">
+                <a:solidFill>
+                  <a:srgbClr val="F8FAFC"/>
+                </a:solidFill>
+                <a:latin typeface="Courier New"/>
+              </a:defRPr>
+            </a:pPr>
+            <a:r>
+              <a:rPr sz="1200" b="0">
+                <a:solidFill>
+                  <a:srgbClr val="F8FAFC"/>
+                </a:solidFill>
+                <a:latin typeface="Courier New"/>
+              </a:rPr>
+              <a:t>print("swiss roll:", Xsr.shape, "| digits subset:", Xd.shape)</a:t>
             </a:r>
           </a:p>
         </p:txBody>
